--- a/public/fun/pack/pptx/birthday/돌잔치_40_첫번째이야기중심_붕어빵포장마차.pptx
+++ b/public/fun/pack/pptx/birthday/돌잔치_40_첫번째이야기중심_붕어빵포장마차.pptx
@@ -3286,14 +3286,6 @@
 <file path=ppt/slides/slide1.xml><?xml version="1.0" encoding="utf-8"?>
 <p:sld xmlns:a="http://schemas.openxmlformats.org/drawingml/2006/main" xmlns:p="http://schemas.openxmlformats.org/presentationml/2006/main" xmlns:r="http://schemas.openxmlformats.org/officeDocument/2006/relationships">
   <p:cSld>
-    <p:bg>
-      <p:bgPr>
-        <a:solidFill>
-          <a:srgbClr val="FFFFFF"/>
-        </a:solidFill>
-        <a:effectLst/>
-      </p:bgPr>
-    </p:bg>
     <p:spTree>
       <p:nvGrpSpPr>
         <p:cNvPr id="1" name=""/>
@@ -3301,383 +3293,30 @@
         <p:nvPr/>
       </p:nvGrpSpPr>
       <p:grpSpPr/>
-      <p:sp>
-        <p:nvSpPr>
-          <p:cNvPr id="3" name="장식"/>
-          <p:cNvSpPr/>
+      <p:pic>
+        <p:nvPicPr>
+          <p:cNvPr id="3" name="표지 그림" descr="birthday-40.jpg"/>
+          <p:cNvPicPr>
+            <a:picLocks noChangeAspect="1"/>
+          </p:cNvPicPr>
           <p:nvPr/>
-        </p:nvSpPr>
-        <p:spPr>
-          <a:xfrm>
-            <a:off x="0" y="2057400"/>
-            <a:ext cx="10241023" cy="1828800"/>
-          </a:xfrm>
-          <a:prstGeom prst="homePlate">
-            <a:avLst/>
-          </a:prstGeom>
-          <a:solidFill>
-            <a:srgbClr val="AE7429"/>
-          </a:solidFill>
-          <a:ln>
-            <a:noFill/>
-          </a:ln>
-        </p:spPr>
-        <p:txBody>
-          <a:bodyPr rtlCol="0" anchor="ctr"/>
-          <a:lstStyle/>
-          <a:p>
-            <a:pPr algn="ctr"/>
-          </a:p>
-        </p:txBody>
-      </p:sp>
-      <p:sp>
-        <p:nvSpPr>
-          <p:cNvPr id="4" name="장식"/>
-          <p:cNvSpPr/>
-          <p:nvPr/>
-        </p:nvSpPr>
-        <p:spPr>
-          <a:xfrm>
-            <a:off x="0" y="3886200"/>
-            <a:ext cx="9509522" cy="64008"/>
+        </p:nvPicPr>
+        <p:blipFill>
+          <a:blip r:embed="rId2"/>
+          <a:stretch>
+            <a:fillRect/>
+          </a:stretch>
+        </p:blipFill>
+        <p:spPr>
+          <a:xfrm>
+            <a:off x="0" y="0"/>
+            <a:ext cx="12191695" cy="6858000"/>
           </a:xfrm>
           <a:prstGeom prst="rect">
             <a:avLst/>
           </a:prstGeom>
-          <a:solidFill>
-            <a:srgbClr val="3B8B91"/>
-          </a:solidFill>
-          <a:ln>
-            <a:noFill/>
-          </a:ln>
-        </p:spPr>
-        <p:txBody>
-          <a:bodyPr rtlCol="0" anchor="ctr"/>
-          <a:lstStyle/>
-          <a:p>
-            <a:pPr algn="ctr"/>
-          </a:p>
-        </p:txBody>
-      </p:sp>
-      <p:sp>
-        <p:nvSpPr>
-          <p:cNvPr id="5" name="장식"/>
-          <p:cNvSpPr/>
-          <p:nvPr/>
-        </p:nvSpPr>
-        <p:spPr>
-          <a:xfrm>
-            <a:off x="9263744" y="704815"/>
-            <a:ext cx="452864" cy="452864"/>
-          </a:xfrm>
-          <a:prstGeom prst="ellipse">
-            <a:avLst/>
-          </a:prstGeom>
-          <a:solidFill>
-            <a:srgbClr val="AE7429"/>
-          </a:solidFill>
-          <a:ln>
-            <a:noFill/>
-          </a:ln>
-        </p:spPr>
-        <p:txBody>
-          <a:bodyPr rtlCol="0" anchor="ctr"/>
-          <a:lstStyle/>
-          <a:p>
-            <a:pPr algn="ctr"/>
-          </a:p>
-        </p:txBody>
-      </p:sp>
-      <p:sp>
-        <p:nvSpPr>
-          <p:cNvPr id="6" name="장식"/>
-          <p:cNvSpPr/>
-          <p:nvPr/>
-        </p:nvSpPr>
-        <p:spPr>
-          <a:xfrm>
-            <a:off x="10595107" y="856829"/>
-            <a:ext cx="275764" cy="275764"/>
-          </a:xfrm>
-          <a:prstGeom prst="ellipse">
-            <a:avLst/>
-          </a:prstGeom>
-          <a:solidFill>
-            <a:srgbClr val="F5E3CC"/>
-          </a:solidFill>
-          <a:ln>
-            <a:noFill/>
-          </a:ln>
-        </p:spPr>
-        <p:txBody>
-          <a:bodyPr rtlCol="0" anchor="ctr"/>
-          <a:lstStyle/>
-          <a:p>
-            <a:pPr algn="ctr"/>
-          </a:p>
-        </p:txBody>
-      </p:sp>
-      <p:sp>
-        <p:nvSpPr>
-          <p:cNvPr id="7" name="장식"/>
-          <p:cNvSpPr/>
-          <p:nvPr/>
-        </p:nvSpPr>
-        <p:spPr>
-          <a:xfrm>
-            <a:off x="11246098" y="2492187"/>
-            <a:ext cx="292227" cy="292227"/>
-          </a:xfrm>
-          <a:prstGeom prst="ellipse">
-            <a:avLst/>
-          </a:prstGeom>
-          <a:solidFill>
-            <a:srgbClr val="3B8B91"/>
-          </a:solidFill>
-          <a:ln>
-            <a:noFill/>
-          </a:ln>
-        </p:spPr>
-        <p:txBody>
-          <a:bodyPr rtlCol="0" anchor="ctr"/>
-          <a:lstStyle/>
-          <a:p>
-            <a:pPr algn="ctr"/>
-          </a:p>
-        </p:txBody>
-      </p:sp>
-      <p:sp>
-        <p:nvSpPr>
-          <p:cNvPr id="8" name="장식"/>
-          <p:cNvSpPr/>
-          <p:nvPr/>
-        </p:nvSpPr>
-        <p:spPr>
-          <a:xfrm>
-            <a:off x="10856002" y="963247"/>
-            <a:ext cx="216899" cy="216899"/>
-          </a:xfrm>
-          <a:prstGeom prst="ellipse">
-            <a:avLst/>
-          </a:prstGeom>
-          <a:solidFill>
-            <a:srgbClr val="AE7429"/>
-          </a:solidFill>
-          <a:ln>
-            <a:noFill/>
-          </a:ln>
-        </p:spPr>
-        <p:txBody>
-          <a:bodyPr rtlCol="0" anchor="ctr"/>
-          <a:lstStyle/>
-          <a:p>
-            <a:pPr algn="ctr"/>
-          </a:p>
-        </p:txBody>
-      </p:sp>
-      <p:sp>
-        <p:nvSpPr>
-          <p:cNvPr id="9" name="장식"/>
-          <p:cNvSpPr/>
-          <p:nvPr/>
-        </p:nvSpPr>
-        <p:spPr>
-          <a:xfrm>
-            <a:off x="9592789" y="299863"/>
-            <a:ext cx="236902" cy="236902"/>
-          </a:xfrm>
-          <a:prstGeom prst="ellipse">
-            <a:avLst/>
-          </a:prstGeom>
-          <a:solidFill>
-            <a:srgbClr val="F5E3CC"/>
-          </a:solidFill>
-          <a:ln>
-            <a:noFill/>
-          </a:ln>
-        </p:spPr>
-        <p:txBody>
-          <a:bodyPr rtlCol="0" anchor="ctr"/>
-          <a:lstStyle/>
-          <a:p>
-            <a:pPr algn="ctr"/>
-          </a:p>
-        </p:txBody>
-      </p:sp>
-      <p:sp>
-        <p:nvSpPr>
-          <p:cNvPr id="10" name="장식"/>
-          <p:cNvSpPr/>
-          <p:nvPr/>
-        </p:nvSpPr>
-        <p:spPr>
-          <a:xfrm>
-            <a:off x="11671528" y="2282743"/>
-            <a:ext cx="391317" cy="391317"/>
-          </a:xfrm>
-          <a:prstGeom prst="ellipse">
-            <a:avLst/>
-          </a:prstGeom>
-          <a:solidFill>
-            <a:srgbClr val="3B8B91"/>
-          </a:solidFill>
-          <a:ln>
-            <a:noFill/>
-          </a:ln>
-        </p:spPr>
-        <p:txBody>
-          <a:bodyPr rtlCol="0" anchor="ctr"/>
-          <a:lstStyle/>
-          <a:p>
-            <a:pPr algn="ctr"/>
-          </a:p>
-        </p:txBody>
-      </p:sp>
-      <p:sp>
-        <p:nvSpPr>
-          <p:cNvPr id="11" name="장식"/>
-          <p:cNvSpPr/>
-          <p:nvPr/>
-        </p:nvSpPr>
-        <p:spPr>
-          <a:xfrm>
-            <a:off x="10999413" y="442115"/>
-            <a:ext cx="455801" cy="455801"/>
-          </a:xfrm>
-          <a:prstGeom prst="ellipse">
-            <a:avLst/>
-          </a:prstGeom>
-          <a:solidFill>
-            <a:srgbClr val="AE7429"/>
-          </a:solidFill>
-          <a:ln>
-            <a:noFill/>
-          </a:ln>
-        </p:spPr>
-        <p:txBody>
-          <a:bodyPr rtlCol="0" anchor="ctr"/>
-          <a:lstStyle/>
-          <a:p>
-            <a:pPr algn="ctr"/>
-          </a:p>
-        </p:txBody>
-      </p:sp>
-      <p:sp>
-        <p:nvSpPr>
-          <p:cNvPr id="12" name="장식"/>
-          <p:cNvSpPr/>
-          <p:nvPr/>
-        </p:nvSpPr>
-        <p:spPr>
-          <a:xfrm>
-            <a:off x="10212933" y="489281"/>
-            <a:ext cx="358123" cy="358123"/>
-          </a:xfrm>
-          <a:prstGeom prst="ellipse">
-            <a:avLst/>
-          </a:prstGeom>
-          <a:solidFill>
-            <a:srgbClr val="F5E3CC"/>
-          </a:solidFill>
-          <a:ln>
-            <a:noFill/>
-          </a:ln>
-        </p:spPr>
-        <p:txBody>
-          <a:bodyPr rtlCol="0" anchor="ctr"/>
-          <a:lstStyle/>
-          <a:p>
-            <a:pPr algn="ctr"/>
-          </a:p>
-        </p:txBody>
-      </p:sp>
-      <p:sp>
-        <p:nvSpPr>
-          <p:cNvPr id="13" name="장식"/>
-          <p:cNvSpPr/>
-          <p:nvPr/>
-        </p:nvSpPr>
-        <p:spPr>
-          <a:xfrm>
-            <a:off x="11865382" y="1333302"/>
-            <a:ext cx="269303" cy="269303"/>
-          </a:xfrm>
-          <a:prstGeom prst="ellipse">
-            <a:avLst/>
-          </a:prstGeom>
-          <a:solidFill>
-            <a:srgbClr val="3B8B91"/>
-          </a:solidFill>
-          <a:ln>
-            <a:noFill/>
-          </a:ln>
-        </p:spPr>
-        <p:txBody>
-          <a:bodyPr rtlCol="0" anchor="ctr"/>
-          <a:lstStyle/>
-          <a:p>
-            <a:pPr algn="ctr"/>
-          </a:p>
-        </p:txBody>
-      </p:sp>
-      <p:sp>
-        <p:nvSpPr>
-          <p:cNvPr id="14" name="장식"/>
-          <p:cNvSpPr/>
-          <p:nvPr/>
-        </p:nvSpPr>
-        <p:spPr>
-          <a:xfrm>
-            <a:off x="11308724" y="1757165"/>
-            <a:ext cx="317138" cy="317138"/>
-          </a:xfrm>
-          <a:prstGeom prst="ellipse">
-            <a:avLst/>
-          </a:prstGeom>
-          <a:solidFill>
-            <a:srgbClr val="AE7429"/>
-          </a:solidFill>
-          <a:ln>
-            <a:noFill/>
-          </a:ln>
-        </p:spPr>
-        <p:txBody>
-          <a:bodyPr rtlCol="0" anchor="ctr"/>
-          <a:lstStyle/>
-          <a:p>
-            <a:pPr algn="ctr"/>
-          </a:p>
-        </p:txBody>
-      </p:sp>
-      <p:sp>
-        <p:nvSpPr>
-          <p:cNvPr id="15" name="장식"/>
-          <p:cNvSpPr/>
-          <p:nvPr/>
-        </p:nvSpPr>
-        <p:spPr>
-          <a:xfrm>
-            <a:off x="9664609" y="74145"/>
-            <a:ext cx="370756" cy="370756"/>
-          </a:xfrm>
-          <a:prstGeom prst="ellipse">
-            <a:avLst/>
-          </a:prstGeom>
-          <a:solidFill>
-            <a:srgbClr val="F5E3CC"/>
-          </a:solidFill>
-          <a:ln>
-            <a:noFill/>
-          </a:ln>
-        </p:spPr>
-        <p:txBody>
-          <a:bodyPr rtlCol="0" anchor="ctr"/>
-          <a:lstStyle/>
-          <a:p>
-            <a:pPr algn="ctr"/>
-          </a:p>
-        </p:txBody>
-      </p:sp>
+        </p:spPr>
+      </p:pic>
       <p:sp>
         <p:nvSpPr>
           <p:cNvPr id="2" name="Title 1"/>
@@ -3690,8 +3329,8 @@
         </p:nvSpPr>
         <p:spPr>
           <a:xfrm>
-            <a:off x="731501" y="2167128"/>
-            <a:ext cx="8778020" cy="1609344"/>
+            <a:off x="853418" y="2057400"/>
+            <a:ext cx="6095847" cy="1554480"/>
           </a:xfrm>
         </p:spPr>
         <p:txBody>
@@ -3708,7 +3347,7 @@
             <a:r>
               <a:rPr sz="4000" b="1" i="0">
                 <a:solidFill>
-                  <a:srgbClr val="FFFFFF"/>
+                  <a:srgbClr val="5B3D15"/>
                 </a:solidFill>
               </a:rPr>
               <a:t>첫 번째 생일</a:t>
@@ -3718,14 +3357,14 @@
       </p:sp>
       <p:sp>
         <p:nvSpPr>
-          <p:cNvPr id="16" name="한 줄 문구"/>
+          <p:cNvPr id="4" name="한 줄 문구"/>
           <p:cNvSpPr txBox="1"/>
           <p:nvPr/>
         </p:nvSpPr>
         <p:spPr>
           <a:xfrm>
-            <a:off x="731501" y="4160520"/>
-            <a:ext cx="8534186" cy="822960"/>
+            <a:off x="853418" y="3749039"/>
+            <a:ext cx="6095847" cy="822960"/>
           </a:xfrm>
           <a:prstGeom prst="rect">
             <a:avLst/>
@@ -3749,21 +3388,21 @@
                   <a:srgbClr val="5B3D15"/>
                 </a:solidFill>
               </a:rPr>
-              <a:t>붕어빵처럼 동글동글 귀여운 너</a:t>
-            </a:r>
-          </a:p>
-        </p:txBody>
-      </p:sp>
-      <p:sp>
-        <p:nvSpPr>
-          <p:cNvPr id="17" name="안내 문구"/>
+              <a:t>처음 이름을 불렀을 때 돌아본 날</a:t>
+            </a:r>
+          </a:p>
+        </p:txBody>
+      </p:sp>
+      <p:sp>
+        <p:nvSpPr>
+          <p:cNvPr id="5" name="안내 문구"/>
           <p:cNvSpPr txBox="1"/>
           <p:nvPr/>
         </p:nvSpPr>
         <p:spPr>
           <a:xfrm>
-            <a:off x="731501" y="5029200"/>
-            <a:ext cx="8534186" cy="914400"/>
+            <a:off x="853418" y="4617720"/>
+            <a:ext cx="6095847" cy="914400"/>
           </a:xfrm>
           <a:prstGeom prst="rect">
             <a:avLst/>
@@ -3787,7 +3426,7 @@
                   <a:srgbClr val="666666"/>
                 </a:solidFill>
               </a:rPr>
-              <a:t>아기 이름 · 2026. 00. 00</a:t>
+              <a:t>아기 이름 · 2027. 00. 00</a:t>
             </a:r>
           </a:p>
           <a:p>
@@ -3864,325 +3503,6 @@
       </p:sp>
       <p:sp>
         <p:nvSpPr>
-          <p:cNvPr id="4" name="장식"/>
-          <p:cNvSpPr/>
-          <p:nvPr/>
-        </p:nvSpPr>
-        <p:spPr>
-          <a:xfrm>
-            <a:off x="10691076" y="489607"/>
-            <a:ext cx="195353" cy="195353"/>
-          </a:xfrm>
-          <a:prstGeom prst="ellipse">
-            <a:avLst/>
-          </a:prstGeom>
-          <a:solidFill>
-            <a:srgbClr val="AE7429"/>
-          </a:solidFill>
-          <a:ln>
-            <a:noFill/>
-          </a:ln>
-        </p:spPr>
-        <p:txBody>
-          <a:bodyPr rtlCol="0" anchor="ctr"/>
-          <a:lstStyle/>
-          <a:p>
-            <a:pPr algn="ctr"/>
-          </a:p>
-        </p:txBody>
-      </p:sp>
-      <p:sp>
-        <p:nvSpPr>
-          <p:cNvPr id="5" name="장식"/>
-          <p:cNvSpPr/>
-          <p:nvPr/>
-        </p:nvSpPr>
-        <p:spPr>
-          <a:xfrm>
-            <a:off x="11265390" y="555182"/>
-            <a:ext cx="118957" cy="118957"/>
-          </a:xfrm>
-          <a:prstGeom prst="ellipse">
-            <a:avLst/>
-          </a:prstGeom>
-          <a:solidFill>
-            <a:srgbClr val="F5E3CC"/>
-          </a:solidFill>
-          <a:ln>
-            <a:noFill/>
-          </a:ln>
-        </p:spPr>
-        <p:txBody>
-          <a:bodyPr rtlCol="0" anchor="ctr"/>
-          <a:lstStyle/>
-          <a:p>
-            <a:pPr algn="ctr"/>
-          </a:p>
-        </p:txBody>
-      </p:sp>
-      <p:sp>
-        <p:nvSpPr>
-          <p:cNvPr id="6" name="장식"/>
-          <p:cNvSpPr/>
-          <p:nvPr/>
-        </p:nvSpPr>
-        <p:spPr>
-          <a:xfrm>
-            <a:off x="11546210" y="1260630"/>
-            <a:ext cx="126058" cy="126058"/>
-          </a:xfrm>
-          <a:prstGeom prst="ellipse">
-            <a:avLst/>
-          </a:prstGeom>
-          <a:solidFill>
-            <a:srgbClr val="3B8B91"/>
-          </a:solidFill>
-          <a:ln>
-            <a:noFill/>
-          </a:ln>
-        </p:spPr>
-        <p:txBody>
-          <a:bodyPr rtlCol="0" anchor="ctr"/>
-          <a:lstStyle/>
-          <a:p>
-            <a:pPr algn="ctr"/>
-          </a:p>
-        </p:txBody>
-      </p:sp>
-      <p:sp>
-        <p:nvSpPr>
-          <p:cNvPr id="7" name="장식"/>
-          <p:cNvSpPr/>
-          <p:nvPr/>
-        </p:nvSpPr>
-        <p:spPr>
-          <a:xfrm>
-            <a:off x="11377933" y="601087"/>
-            <a:ext cx="93564" cy="93564"/>
-          </a:xfrm>
-          <a:prstGeom prst="ellipse">
-            <a:avLst/>
-          </a:prstGeom>
-          <a:solidFill>
-            <a:srgbClr val="AE7429"/>
-          </a:solidFill>
-          <a:ln>
-            <a:noFill/>
-          </a:ln>
-        </p:spPr>
-        <p:txBody>
-          <a:bodyPr rtlCol="0" anchor="ctr"/>
-          <a:lstStyle/>
-          <a:p>
-            <a:pPr algn="ctr"/>
-          </a:p>
-        </p:txBody>
-      </p:sp>
-      <p:sp>
-        <p:nvSpPr>
-          <p:cNvPr id="8" name="장식"/>
-          <p:cNvSpPr/>
-          <p:nvPr/>
-        </p:nvSpPr>
-        <p:spPr>
-          <a:xfrm>
-            <a:off x="10833017" y="314922"/>
-            <a:ext cx="102193" cy="102193"/>
-          </a:xfrm>
-          <a:prstGeom prst="ellipse">
-            <a:avLst/>
-          </a:prstGeom>
-          <a:solidFill>
-            <a:srgbClr val="F5E3CC"/>
-          </a:solidFill>
-          <a:ln>
-            <a:noFill/>
-          </a:ln>
-        </p:spPr>
-        <p:txBody>
-          <a:bodyPr rtlCol="0" anchor="ctr"/>
-          <a:lstStyle/>
-          <a:p>
-            <a:pPr algn="ctr"/>
-          </a:p>
-        </p:txBody>
-      </p:sp>
-      <p:sp>
-        <p:nvSpPr>
-          <p:cNvPr id="9" name="장식"/>
-          <p:cNvSpPr/>
-          <p:nvPr/>
-        </p:nvSpPr>
-        <p:spPr>
-          <a:xfrm>
-            <a:off x="11729729" y="1170282"/>
-            <a:ext cx="168803" cy="168803"/>
-          </a:xfrm>
-          <a:prstGeom prst="ellipse">
-            <a:avLst/>
-          </a:prstGeom>
-          <a:solidFill>
-            <a:srgbClr val="3B8B91"/>
-          </a:solidFill>
-          <a:ln>
-            <a:noFill/>
-          </a:ln>
-        </p:spPr>
-        <p:txBody>
-          <a:bodyPr rtlCol="0" anchor="ctr"/>
-          <a:lstStyle/>
-          <a:p>
-            <a:pPr algn="ctr"/>
-          </a:p>
-        </p:txBody>
-      </p:sp>
-      <p:sp>
-        <p:nvSpPr>
-          <p:cNvPr id="10" name="장식"/>
-          <p:cNvSpPr/>
-          <p:nvPr/>
-        </p:nvSpPr>
-        <p:spPr>
-          <a:xfrm>
-            <a:off x="11439796" y="376285"/>
-            <a:ext cx="196620" cy="196620"/>
-          </a:xfrm>
-          <a:prstGeom prst="ellipse">
-            <a:avLst/>
-          </a:prstGeom>
-          <a:solidFill>
-            <a:srgbClr val="AE7429"/>
-          </a:solidFill>
-          <a:ln>
-            <a:noFill/>
-          </a:ln>
-        </p:spPr>
-        <p:txBody>
-          <a:bodyPr rtlCol="0" anchor="ctr"/>
-          <a:lstStyle/>
-          <a:p>
-            <a:pPr algn="ctr"/>
-          </a:p>
-        </p:txBody>
-      </p:sp>
-      <p:sp>
-        <p:nvSpPr>
-          <p:cNvPr id="11" name="장식"/>
-          <p:cNvSpPr/>
-          <p:nvPr/>
-        </p:nvSpPr>
-        <p:spPr>
-          <a:xfrm>
-            <a:off x="11100531" y="396632"/>
-            <a:ext cx="154484" cy="154484"/>
-          </a:xfrm>
-          <a:prstGeom prst="ellipse">
-            <a:avLst/>
-          </a:prstGeom>
-          <a:solidFill>
-            <a:srgbClr val="F5E3CC"/>
-          </a:solidFill>
-          <a:ln>
-            <a:noFill/>
-          </a:ln>
-        </p:spPr>
-        <p:txBody>
-          <a:bodyPr rtlCol="0" anchor="ctr"/>
-          <a:lstStyle/>
-          <a:p>
-            <a:pPr algn="ctr"/>
-          </a:p>
-        </p:txBody>
-      </p:sp>
-      <p:sp>
-        <p:nvSpPr>
-          <p:cNvPr id="12" name="장식"/>
-          <p:cNvSpPr/>
-          <p:nvPr/>
-        </p:nvSpPr>
-        <p:spPr>
-          <a:xfrm>
-            <a:off x="11813352" y="760719"/>
-            <a:ext cx="116170" cy="116170"/>
-          </a:xfrm>
-          <a:prstGeom prst="ellipse">
-            <a:avLst/>
-          </a:prstGeom>
-          <a:solidFill>
-            <a:srgbClr val="3B8B91"/>
-          </a:solidFill>
-          <a:ln>
-            <a:noFill/>
-          </a:ln>
-        </p:spPr>
-        <p:txBody>
-          <a:bodyPr rtlCol="0" anchor="ctr"/>
-          <a:lstStyle/>
-          <a:p>
-            <a:pPr algn="ctr"/>
-          </a:p>
-        </p:txBody>
-      </p:sp>
-      <p:sp>
-        <p:nvSpPr>
-          <p:cNvPr id="13" name="장식"/>
-          <p:cNvSpPr/>
-          <p:nvPr/>
-        </p:nvSpPr>
-        <p:spPr>
-          <a:xfrm>
-            <a:off x="11573225" y="943562"/>
-            <a:ext cx="136804" cy="136804"/>
-          </a:xfrm>
-          <a:prstGeom prst="ellipse">
-            <a:avLst/>
-          </a:prstGeom>
-          <a:solidFill>
-            <a:srgbClr val="AE7429"/>
-          </a:solidFill>
-          <a:ln>
-            <a:noFill/>
-          </a:ln>
-        </p:spPr>
-        <p:txBody>
-          <a:bodyPr rtlCol="0" anchor="ctr"/>
-          <a:lstStyle/>
-          <a:p>
-            <a:pPr algn="ctr"/>
-          </a:p>
-        </p:txBody>
-      </p:sp>
-      <p:sp>
-        <p:nvSpPr>
-          <p:cNvPr id="14" name="장식"/>
-          <p:cNvSpPr/>
-          <p:nvPr/>
-        </p:nvSpPr>
-        <p:spPr>
-          <a:xfrm>
-            <a:off x="10863999" y="217553"/>
-            <a:ext cx="159934" cy="159934"/>
-          </a:xfrm>
-          <a:prstGeom prst="ellipse">
-            <a:avLst/>
-          </a:prstGeom>
-          <a:solidFill>
-            <a:srgbClr val="F5E3CC"/>
-          </a:solidFill>
-          <a:ln>
-            <a:noFill/>
-          </a:ln>
-        </p:spPr>
-        <p:txBody>
-          <a:bodyPr rtlCol="0" anchor="ctr"/>
-          <a:lstStyle/>
-          <a:p>
-            <a:pPr algn="ctr"/>
-          </a:p>
-        </p:txBody>
-      </p:sp>
-      <p:sp>
-        <p:nvSpPr>
           <p:cNvPr id="2" name="Title 1"/>
           <p:cNvSpPr>
             <a:spLocks noGrp="1"/>
@@ -4221,7 +3541,7 @@
       </p:sp>
       <p:sp>
         <p:nvSpPr>
-          <p:cNvPr id="15" name="사진 자리"/>
+          <p:cNvPr id="4" name="사진 자리"/>
           <p:cNvSpPr/>
           <p:nvPr/>
         </p:nvSpPr>
@@ -4269,7 +3589,7 @@
       </p:sp>
       <p:graphicFrame>
         <p:nvGraphicFramePr>
-          <p:cNvPr id="16" name="표"/>
+          <p:cNvPr id="5" name="표"/>
           <p:cNvGraphicFramePr>
             <a:graphicFrameLocks noGrp="1"/>
           </p:cNvGraphicFramePr>
@@ -4914,325 +4234,6 @@
       </p:sp>
       <p:sp>
         <p:nvSpPr>
-          <p:cNvPr id="4" name="장식"/>
-          <p:cNvSpPr/>
-          <p:nvPr/>
-        </p:nvSpPr>
-        <p:spPr>
-          <a:xfrm>
-            <a:off x="10691076" y="489607"/>
-            <a:ext cx="195353" cy="195353"/>
-          </a:xfrm>
-          <a:prstGeom prst="ellipse">
-            <a:avLst/>
-          </a:prstGeom>
-          <a:solidFill>
-            <a:srgbClr val="AE7429"/>
-          </a:solidFill>
-          <a:ln>
-            <a:noFill/>
-          </a:ln>
-        </p:spPr>
-        <p:txBody>
-          <a:bodyPr rtlCol="0" anchor="ctr"/>
-          <a:lstStyle/>
-          <a:p>
-            <a:pPr algn="ctr"/>
-          </a:p>
-        </p:txBody>
-      </p:sp>
-      <p:sp>
-        <p:nvSpPr>
-          <p:cNvPr id="5" name="장식"/>
-          <p:cNvSpPr/>
-          <p:nvPr/>
-        </p:nvSpPr>
-        <p:spPr>
-          <a:xfrm>
-            <a:off x="11265390" y="555182"/>
-            <a:ext cx="118957" cy="118957"/>
-          </a:xfrm>
-          <a:prstGeom prst="ellipse">
-            <a:avLst/>
-          </a:prstGeom>
-          <a:solidFill>
-            <a:srgbClr val="F5E3CC"/>
-          </a:solidFill>
-          <a:ln>
-            <a:noFill/>
-          </a:ln>
-        </p:spPr>
-        <p:txBody>
-          <a:bodyPr rtlCol="0" anchor="ctr"/>
-          <a:lstStyle/>
-          <a:p>
-            <a:pPr algn="ctr"/>
-          </a:p>
-        </p:txBody>
-      </p:sp>
-      <p:sp>
-        <p:nvSpPr>
-          <p:cNvPr id="6" name="장식"/>
-          <p:cNvSpPr/>
-          <p:nvPr/>
-        </p:nvSpPr>
-        <p:spPr>
-          <a:xfrm>
-            <a:off x="11546210" y="1260630"/>
-            <a:ext cx="126058" cy="126058"/>
-          </a:xfrm>
-          <a:prstGeom prst="ellipse">
-            <a:avLst/>
-          </a:prstGeom>
-          <a:solidFill>
-            <a:srgbClr val="3B8B91"/>
-          </a:solidFill>
-          <a:ln>
-            <a:noFill/>
-          </a:ln>
-        </p:spPr>
-        <p:txBody>
-          <a:bodyPr rtlCol="0" anchor="ctr"/>
-          <a:lstStyle/>
-          <a:p>
-            <a:pPr algn="ctr"/>
-          </a:p>
-        </p:txBody>
-      </p:sp>
-      <p:sp>
-        <p:nvSpPr>
-          <p:cNvPr id="7" name="장식"/>
-          <p:cNvSpPr/>
-          <p:nvPr/>
-        </p:nvSpPr>
-        <p:spPr>
-          <a:xfrm>
-            <a:off x="11377933" y="601087"/>
-            <a:ext cx="93564" cy="93564"/>
-          </a:xfrm>
-          <a:prstGeom prst="ellipse">
-            <a:avLst/>
-          </a:prstGeom>
-          <a:solidFill>
-            <a:srgbClr val="AE7429"/>
-          </a:solidFill>
-          <a:ln>
-            <a:noFill/>
-          </a:ln>
-        </p:spPr>
-        <p:txBody>
-          <a:bodyPr rtlCol="0" anchor="ctr"/>
-          <a:lstStyle/>
-          <a:p>
-            <a:pPr algn="ctr"/>
-          </a:p>
-        </p:txBody>
-      </p:sp>
-      <p:sp>
-        <p:nvSpPr>
-          <p:cNvPr id="8" name="장식"/>
-          <p:cNvSpPr/>
-          <p:nvPr/>
-        </p:nvSpPr>
-        <p:spPr>
-          <a:xfrm>
-            <a:off x="10833017" y="314922"/>
-            <a:ext cx="102193" cy="102193"/>
-          </a:xfrm>
-          <a:prstGeom prst="ellipse">
-            <a:avLst/>
-          </a:prstGeom>
-          <a:solidFill>
-            <a:srgbClr val="F5E3CC"/>
-          </a:solidFill>
-          <a:ln>
-            <a:noFill/>
-          </a:ln>
-        </p:spPr>
-        <p:txBody>
-          <a:bodyPr rtlCol="0" anchor="ctr"/>
-          <a:lstStyle/>
-          <a:p>
-            <a:pPr algn="ctr"/>
-          </a:p>
-        </p:txBody>
-      </p:sp>
-      <p:sp>
-        <p:nvSpPr>
-          <p:cNvPr id="9" name="장식"/>
-          <p:cNvSpPr/>
-          <p:nvPr/>
-        </p:nvSpPr>
-        <p:spPr>
-          <a:xfrm>
-            <a:off x="11729729" y="1170282"/>
-            <a:ext cx="168803" cy="168803"/>
-          </a:xfrm>
-          <a:prstGeom prst="ellipse">
-            <a:avLst/>
-          </a:prstGeom>
-          <a:solidFill>
-            <a:srgbClr val="3B8B91"/>
-          </a:solidFill>
-          <a:ln>
-            <a:noFill/>
-          </a:ln>
-        </p:spPr>
-        <p:txBody>
-          <a:bodyPr rtlCol="0" anchor="ctr"/>
-          <a:lstStyle/>
-          <a:p>
-            <a:pPr algn="ctr"/>
-          </a:p>
-        </p:txBody>
-      </p:sp>
-      <p:sp>
-        <p:nvSpPr>
-          <p:cNvPr id="10" name="장식"/>
-          <p:cNvSpPr/>
-          <p:nvPr/>
-        </p:nvSpPr>
-        <p:spPr>
-          <a:xfrm>
-            <a:off x="11439796" y="376285"/>
-            <a:ext cx="196620" cy="196620"/>
-          </a:xfrm>
-          <a:prstGeom prst="ellipse">
-            <a:avLst/>
-          </a:prstGeom>
-          <a:solidFill>
-            <a:srgbClr val="AE7429"/>
-          </a:solidFill>
-          <a:ln>
-            <a:noFill/>
-          </a:ln>
-        </p:spPr>
-        <p:txBody>
-          <a:bodyPr rtlCol="0" anchor="ctr"/>
-          <a:lstStyle/>
-          <a:p>
-            <a:pPr algn="ctr"/>
-          </a:p>
-        </p:txBody>
-      </p:sp>
-      <p:sp>
-        <p:nvSpPr>
-          <p:cNvPr id="11" name="장식"/>
-          <p:cNvSpPr/>
-          <p:nvPr/>
-        </p:nvSpPr>
-        <p:spPr>
-          <a:xfrm>
-            <a:off x="11100531" y="396632"/>
-            <a:ext cx="154484" cy="154484"/>
-          </a:xfrm>
-          <a:prstGeom prst="ellipse">
-            <a:avLst/>
-          </a:prstGeom>
-          <a:solidFill>
-            <a:srgbClr val="F5E3CC"/>
-          </a:solidFill>
-          <a:ln>
-            <a:noFill/>
-          </a:ln>
-        </p:spPr>
-        <p:txBody>
-          <a:bodyPr rtlCol="0" anchor="ctr"/>
-          <a:lstStyle/>
-          <a:p>
-            <a:pPr algn="ctr"/>
-          </a:p>
-        </p:txBody>
-      </p:sp>
-      <p:sp>
-        <p:nvSpPr>
-          <p:cNvPr id="12" name="장식"/>
-          <p:cNvSpPr/>
-          <p:nvPr/>
-        </p:nvSpPr>
-        <p:spPr>
-          <a:xfrm>
-            <a:off x="11813352" y="760719"/>
-            <a:ext cx="116170" cy="116170"/>
-          </a:xfrm>
-          <a:prstGeom prst="ellipse">
-            <a:avLst/>
-          </a:prstGeom>
-          <a:solidFill>
-            <a:srgbClr val="3B8B91"/>
-          </a:solidFill>
-          <a:ln>
-            <a:noFill/>
-          </a:ln>
-        </p:spPr>
-        <p:txBody>
-          <a:bodyPr rtlCol="0" anchor="ctr"/>
-          <a:lstStyle/>
-          <a:p>
-            <a:pPr algn="ctr"/>
-          </a:p>
-        </p:txBody>
-      </p:sp>
-      <p:sp>
-        <p:nvSpPr>
-          <p:cNvPr id="13" name="장식"/>
-          <p:cNvSpPr/>
-          <p:nvPr/>
-        </p:nvSpPr>
-        <p:spPr>
-          <a:xfrm>
-            <a:off x="11573225" y="943562"/>
-            <a:ext cx="136804" cy="136804"/>
-          </a:xfrm>
-          <a:prstGeom prst="ellipse">
-            <a:avLst/>
-          </a:prstGeom>
-          <a:solidFill>
-            <a:srgbClr val="AE7429"/>
-          </a:solidFill>
-          <a:ln>
-            <a:noFill/>
-          </a:ln>
-        </p:spPr>
-        <p:txBody>
-          <a:bodyPr rtlCol="0" anchor="ctr"/>
-          <a:lstStyle/>
-          <a:p>
-            <a:pPr algn="ctr"/>
-          </a:p>
-        </p:txBody>
-      </p:sp>
-      <p:sp>
-        <p:nvSpPr>
-          <p:cNvPr id="14" name="장식"/>
-          <p:cNvSpPr/>
-          <p:nvPr/>
-        </p:nvSpPr>
-        <p:spPr>
-          <a:xfrm>
-            <a:off x="10863999" y="217553"/>
-            <a:ext cx="159934" cy="159934"/>
-          </a:xfrm>
-          <a:prstGeom prst="ellipse">
-            <a:avLst/>
-          </a:prstGeom>
-          <a:solidFill>
-            <a:srgbClr val="F5E3CC"/>
-          </a:solidFill>
-          <a:ln>
-            <a:noFill/>
-          </a:ln>
-        </p:spPr>
-        <p:txBody>
-          <a:bodyPr rtlCol="0" anchor="ctr"/>
-          <a:lstStyle/>
-          <a:p>
-            <a:pPr algn="ctr"/>
-          </a:p>
-        </p:txBody>
-      </p:sp>
-      <p:sp>
-        <p:nvSpPr>
           <p:cNvPr id="2" name="Title 1"/>
           <p:cNvSpPr>
             <a:spLocks noGrp="1"/>
@@ -5271,7 +4272,7 @@
       </p:sp>
       <p:sp>
         <p:nvSpPr>
-          <p:cNvPr id="15" name="타임라인 선"/>
+          <p:cNvPr id="4" name="타임라인 선"/>
           <p:cNvSpPr/>
           <p:nvPr/>
         </p:nvSpPr>
@@ -5300,7 +4301,7 @@
       </p:sp>
       <p:sp>
         <p:nvSpPr>
-          <p:cNvPr id="16" name="때 1"/>
+          <p:cNvPr id="5" name="때 1"/>
           <p:cNvSpPr/>
           <p:nvPr/>
         </p:nvSpPr>
@@ -5331,7 +4332,7 @@
       </p:sp>
       <p:sp>
         <p:nvSpPr>
-          <p:cNvPr id="17" name="TextBox 16"/>
+          <p:cNvPr id="6" name="TextBox 5"/>
           <p:cNvSpPr txBox="1"/>
           <p:nvPr/>
         </p:nvSpPr>
@@ -5369,7 +4370,7 @@
       </p:sp>
       <p:sp>
         <p:nvSpPr>
-          <p:cNvPr id="18" name="TextBox 17"/>
+          <p:cNvPr id="7" name="TextBox 6"/>
           <p:cNvSpPr txBox="1"/>
           <p:nvPr/>
         </p:nvSpPr>
@@ -5407,7 +4408,7 @@
       </p:sp>
       <p:sp>
         <p:nvSpPr>
-          <p:cNvPr id="19" name="TextBox 18"/>
+          <p:cNvPr id="8" name="TextBox 7"/>
           <p:cNvSpPr txBox="1"/>
           <p:nvPr/>
         </p:nvSpPr>
@@ -5445,7 +4446,7 @@
       </p:sp>
       <p:sp>
         <p:nvSpPr>
-          <p:cNvPr id="20" name="때 2"/>
+          <p:cNvPr id="9" name="때 2"/>
           <p:cNvSpPr/>
           <p:nvPr/>
         </p:nvSpPr>
@@ -5476,7 +4477,7 @@
       </p:sp>
       <p:sp>
         <p:nvSpPr>
-          <p:cNvPr id="21" name="TextBox 20"/>
+          <p:cNvPr id="10" name="TextBox 9"/>
           <p:cNvSpPr txBox="1"/>
           <p:nvPr/>
         </p:nvSpPr>
@@ -5514,7 +4515,7 @@
       </p:sp>
       <p:sp>
         <p:nvSpPr>
-          <p:cNvPr id="22" name="TextBox 21"/>
+          <p:cNvPr id="11" name="TextBox 10"/>
           <p:cNvSpPr txBox="1"/>
           <p:nvPr/>
         </p:nvSpPr>
@@ -5552,7 +4553,7 @@
       </p:sp>
       <p:sp>
         <p:nvSpPr>
-          <p:cNvPr id="23" name="TextBox 22"/>
+          <p:cNvPr id="12" name="TextBox 11"/>
           <p:cNvSpPr txBox="1"/>
           <p:nvPr/>
         </p:nvSpPr>
@@ -5590,7 +4591,7 @@
       </p:sp>
       <p:sp>
         <p:nvSpPr>
-          <p:cNvPr id="24" name="때 3"/>
+          <p:cNvPr id="13" name="때 3"/>
           <p:cNvSpPr/>
           <p:nvPr/>
         </p:nvSpPr>
@@ -5621,7 +4622,7 @@
       </p:sp>
       <p:sp>
         <p:nvSpPr>
-          <p:cNvPr id="25" name="TextBox 24"/>
+          <p:cNvPr id="14" name="TextBox 13"/>
           <p:cNvSpPr txBox="1"/>
           <p:nvPr/>
         </p:nvSpPr>
@@ -5659,7 +4660,7 @@
       </p:sp>
       <p:sp>
         <p:nvSpPr>
-          <p:cNvPr id="26" name="TextBox 25"/>
+          <p:cNvPr id="15" name="TextBox 14"/>
           <p:cNvSpPr txBox="1"/>
           <p:nvPr/>
         </p:nvSpPr>
@@ -5697,7 +4698,7 @@
       </p:sp>
       <p:sp>
         <p:nvSpPr>
-          <p:cNvPr id="27" name="TextBox 26"/>
+          <p:cNvPr id="16" name="TextBox 15"/>
           <p:cNvSpPr txBox="1"/>
           <p:nvPr/>
         </p:nvSpPr>
@@ -5735,7 +4736,7 @@
       </p:sp>
       <p:sp>
         <p:nvSpPr>
-          <p:cNvPr id="28" name="때 4"/>
+          <p:cNvPr id="17" name="때 4"/>
           <p:cNvSpPr/>
           <p:nvPr/>
         </p:nvSpPr>
@@ -5766,7 +4767,7 @@
       </p:sp>
       <p:sp>
         <p:nvSpPr>
-          <p:cNvPr id="29" name="TextBox 28"/>
+          <p:cNvPr id="18" name="TextBox 17"/>
           <p:cNvSpPr txBox="1"/>
           <p:nvPr/>
         </p:nvSpPr>
@@ -5804,7 +4805,7 @@
       </p:sp>
       <p:sp>
         <p:nvSpPr>
-          <p:cNvPr id="30" name="TextBox 29"/>
+          <p:cNvPr id="19" name="TextBox 18"/>
           <p:cNvSpPr txBox="1"/>
           <p:nvPr/>
         </p:nvSpPr>
@@ -5842,7 +4843,7 @@
       </p:sp>
       <p:sp>
         <p:nvSpPr>
-          <p:cNvPr id="31" name="TextBox 30"/>
+          <p:cNvPr id="20" name="TextBox 19"/>
           <p:cNvSpPr txBox="1"/>
           <p:nvPr/>
         </p:nvSpPr>
@@ -5935,325 +4936,6 @@
       </p:sp>
       <p:sp>
         <p:nvSpPr>
-          <p:cNvPr id="4" name="장식"/>
-          <p:cNvSpPr/>
-          <p:nvPr/>
-        </p:nvSpPr>
-        <p:spPr>
-          <a:xfrm>
-            <a:off x="10691076" y="489607"/>
-            <a:ext cx="195353" cy="195353"/>
-          </a:xfrm>
-          <a:prstGeom prst="ellipse">
-            <a:avLst/>
-          </a:prstGeom>
-          <a:solidFill>
-            <a:srgbClr val="AE7429"/>
-          </a:solidFill>
-          <a:ln>
-            <a:noFill/>
-          </a:ln>
-        </p:spPr>
-        <p:txBody>
-          <a:bodyPr rtlCol="0" anchor="ctr"/>
-          <a:lstStyle/>
-          <a:p>
-            <a:pPr algn="ctr"/>
-          </a:p>
-        </p:txBody>
-      </p:sp>
-      <p:sp>
-        <p:nvSpPr>
-          <p:cNvPr id="5" name="장식"/>
-          <p:cNvSpPr/>
-          <p:nvPr/>
-        </p:nvSpPr>
-        <p:spPr>
-          <a:xfrm>
-            <a:off x="11265390" y="555182"/>
-            <a:ext cx="118957" cy="118957"/>
-          </a:xfrm>
-          <a:prstGeom prst="ellipse">
-            <a:avLst/>
-          </a:prstGeom>
-          <a:solidFill>
-            <a:srgbClr val="F5E3CC"/>
-          </a:solidFill>
-          <a:ln>
-            <a:noFill/>
-          </a:ln>
-        </p:spPr>
-        <p:txBody>
-          <a:bodyPr rtlCol="0" anchor="ctr"/>
-          <a:lstStyle/>
-          <a:p>
-            <a:pPr algn="ctr"/>
-          </a:p>
-        </p:txBody>
-      </p:sp>
-      <p:sp>
-        <p:nvSpPr>
-          <p:cNvPr id="6" name="장식"/>
-          <p:cNvSpPr/>
-          <p:nvPr/>
-        </p:nvSpPr>
-        <p:spPr>
-          <a:xfrm>
-            <a:off x="11546210" y="1260630"/>
-            <a:ext cx="126058" cy="126058"/>
-          </a:xfrm>
-          <a:prstGeom prst="ellipse">
-            <a:avLst/>
-          </a:prstGeom>
-          <a:solidFill>
-            <a:srgbClr val="3B8B91"/>
-          </a:solidFill>
-          <a:ln>
-            <a:noFill/>
-          </a:ln>
-        </p:spPr>
-        <p:txBody>
-          <a:bodyPr rtlCol="0" anchor="ctr"/>
-          <a:lstStyle/>
-          <a:p>
-            <a:pPr algn="ctr"/>
-          </a:p>
-        </p:txBody>
-      </p:sp>
-      <p:sp>
-        <p:nvSpPr>
-          <p:cNvPr id="7" name="장식"/>
-          <p:cNvSpPr/>
-          <p:nvPr/>
-        </p:nvSpPr>
-        <p:spPr>
-          <a:xfrm>
-            <a:off x="11377933" y="601087"/>
-            <a:ext cx="93564" cy="93564"/>
-          </a:xfrm>
-          <a:prstGeom prst="ellipse">
-            <a:avLst/>
-          </a:prstGeom>
-          <a:solidFill>
-            <a:srgbClr val="AE7429"/>
-          </a:solidFill>
-          <a:ln>
-            <a:noFill/>
-          </a:ln>
-        </p:spPr>
-        <p:txBody>
-          <a:bodyPr rtlCol="0" anchor="ctr"/>
-          <a:lstStyle/>
-          <a:p>
-            <a:pPr algn="ctr"/>
-          </a:p>
-        </p:txBody>
-      </p:sp>
-      <p:sp>
-        <p:nvSpPr>
-          <p:cNvPr id="8" name="장식"/>
-          <p:cNvSpPr/>
-          <p:nvPr/>
-        </p:nvSpPr>
-        <p:spPr>
-          <a:xfrm>
-            <a:off x="10833017" y="314922"/>
-            <a:ext cx="102193" cy="102193"/>
-          </a:xfrm>
-          <a:prstGeom prst="ellipse">
-            <a:avLst/>
-          </a:prstGeom>
-          <a:solidFill>
-            <a:srgbClr val="F5E3CC"/>
-          </a:solidFill>
-          <a:ln>
-            <a:noFill/>
-          </a:ln>
-        </p:spPr>
-        <p:txBody>
-          <a:bodyPr rtlCol="0" anchor="ctr"/>
-          <a:lstStyle/>
-          <a:p>
-            <a:pPr algn="ctr"/>
-          </a:p>
-        </p:txBody>
-      </p:sp>
-      <p:sp>
-        <p:nvSpPr>
-          <p:cNvPr id="9" name="장식"/>
-          <p:cNvSpPr/>
-          <p:nvPr/>
-        </p:nvSpPr>
-        <p:spPr>
-          <a:xfrm>
-            <a:off x="11729729" y="1170282"/>
-            <a:ext cx="168803" cy="168803"/>
-          </a:xfrm>
-          <a:prstGeom prst="ellipse">
-            <a:avLst/>
-          </a:prstGeom>
-          <a:solidFill>
-            <a:srgbClr val="3B8B91"/>
-          </a:solidFill>
-          <a:ln>
-            <a:noFill/>
-          </a:ln>
-        </p:spPr>
-        <p:txBody>
-          <a:bodyPr rtlCol="0" anchor="ctr"/>
-          <a:lstStyle/>
-          <a:p>
-            <a:pPr algn="ctr"/>
-          </a:p>
-        </p:txBody>
-      </p:sp>
-      <p:sp>
-        <p:nvSpPr>
-          <p:cNvPr id="10" name="장식"/>
-          <p:cNvSpPr/>
-          <p:nvPr/>
-        </p:nvSpPr>
-        <p:spPr>
-          <a:xfrm>
-            <a:off x="11439796" y="376285"/>
-            <a:ext cx="196620" cy="196620"/>
-          </a:xfrm>
-          <a:prstGeom prst="ellipse">
-            <a:avLst/>
-          </a:prstGeom>
-          <a:solidFill>
-            <a:srgbClr val="AE7429"/>
-          </a:solidFill>
-          <a:ln>
-            <a:noFill/>
-          </a:ln>
-        </p:spPr>
-        <p:txBody>
-          <a:bodyPr rtlCol="0" anchor="ctr"/>
-          <a:lstStyle/>
-          <a:p>
-            <a:pPr algn="ctr"/>
-          </a:p>
-        </p:txBody>
-      </p:sp>
-      <p:sp>
-        <p:nvSpPr>
-          <p:cNvPr id="11" name="장식"/>
-          <p:cNvSpPr/>
-          <p:nvPr/>
-        </p:nvSpPr>
-        <p:spPr>
-          <a:xfrm>
-            <a:off x="11100531" y="396632"/>
-            <a:ext cx="154484" cy="154484"/>
-          </a:xfrm>
-          <a:prstGeom prst="ellipse">
-            <a:avLst/>
-          </a:prstGeom>
-          <a:solidFill>
-            <a:srgbClr val="F5E3CC"/>
-          </a:solidFill>
-          <a:ln>
-            <a:noFill/>
-          </a:ln>
-        </p:spPr>
-        <p:txBody>
-          <a:bodyPr rtlCol="0" anchor="ctr"/>
-          <a:lstStyle/>
-          <a:p>
-            <a:pPr algn="ctr"/>
-          </a:p>
-        </p:txBody>
-      </p:sp>
-      <p:sp>
-        <p:nvSpPr>
-          <p:cNvPr id="12" name="장식"/>
-          <p:cNvSpPr/>
-          <p:nvPr/>
-        </p:nvSpPr>
-        <p:spPr>
-          <a:xfrm>
-            <a:off x="11813352" y="760719"/>
-            <a:ext cx="116170" cy="116170"/>
-          </a:xfrm>
-          <a:prstGeom prst="ellipse">
-            <a:avLst/>
-          </a:prstGeom>
-          <a:solidFill>
-            <a:srgbClr val="3B8B91"/>
-          </a:solidFill>
-          <a:ln>
-            <a:noFill/>
-          </a:ln>
-        </p:spPr>
-        <p:txBody>
-          <a:bodyPr rtlCol="0" anchor="ctr"/>
-          <a:lstStyle/>
-          <a:p>
-            <a:pPr algn="ctr"/>
-          </a:p>
-        </p:txBody>
-      </p:sp>
-      <p:sp>
-        <p:nvSpPr>
-          <p:cNvPr id="13" name="장식"/>
-          <p:cNvSpPr/>
-          <p:nvPr/>
-        </p:nvSpPr>
-        <p:spPr>
-          <a:xfrm>
-            <a:off x="11573225" y="943562"/>
-            <a:ext cx="136804" cy="136804"/>
-          </a:xfrm>
-          <a:prstGeom prst="ellipse">
-            <a:avLst/>
-          </a:prstGeom>
-          <a:solidFill>
-            <a:srgbClr val="AE7429"/>
-          </a:solidFill>
-          <a:ln>
-            <a:noFill/>
-          </a:ln>
-        </p:spPr>
-        <p:txBody>
-          <a:bodyPr rtlCol="0" anchor="ctr"/>
-          <a:lstStyle/>
-          <a:p>
-            <a:pPr algn="ctr"/>
-          </a:p>
-        </p:txBody>
-      </p:sp>
-      <p:sp>
-        <p:nvSpPr>
-          <p:cNvPr id="14" name="장식"/>
-          <p:cNvSpPr/>
-          <p:nvPr/>
-        </p:nvSpPr>
-        <p:spPr>
-          <a:xfrm>
-            <a:off x="10863999" y="217553"/>
-            <a:ext cx="159934" cy="159934"/>
-          </a:xfrm>
-          <a:prstGeom prst="ellipse">
-            <a:avLst/>
-          </a:prstGeom>
-          <a:solidFill>
-            <a:srgbClr val="F5E3CC"/>
-          </a:solidFill>
-          <a:ln>
-            <a:noFill/>
-          </a:ln>
-        </p:spPr>
-        <p:txBody>
-          <a:bodyPr rtlCol="0" anchor="ctr"/>
-          <a:lstStyle/>
-          <a:p>
-            <a:pPr algn="ctr"/>
-          </a:p>
-        </p:txBody>
-      </p:sp>
-      <p:sp>
-        <p:nvSpPr>
           <p:cNvPr id="2" name="Title 1"/>
           <p:cNvSpPr>
             <a:spLocks noGrp="1"/>
@@ -6292,7 +4974,7 @@
       </p:sp>
       <p:sp>
         <p:nvSpPr>
-          <p:cNvPr id="15" name="카드 1"/>
+          <p:cNvPr id="4" name="카드 1"/>
           <p:cNvSpPr/>
           <p:nvPr/>
         </p:nvSpPr>
@@ -6325,7 +5007,7 @@
       </p:sp>
       <p:sp>
         <p:nvSpPr>
-          <p:cNvPr id="16" name="번호 1"/>
+          <p:cNvPr id="5" name="번호 1"/>
           <p:cNvSpPr/>
           <p:nvPr/>
         </p:nvSpPr>
@@ -6368,7 +5050,7 @@
       </p:sp>
       <p:sp>
         <p:nvSpPr>
-          <p:cNvPr id="17" name="TextBox 16"/>
+          <p:cNvPr id="6" name="TextBox 5"/>
           <p:cNvSpPr txBox="1"/>
           <p:nvPr/>
         </p:nvSpPr>
@@ -6406,7 +5088,7 @@
       </p:sp>
       <p:sp>
         <p:nvSpPr>
-          <p:cNvPr id="18" name="TextBox 17"/>
+          <p:cNvPr id="7" name="TextBox 6"/>
           <p:cNvSpPr txBox="1"/>
           <p:nvPr/>
         </p:nvSpPr>
@@ -6444,7 +5126,7 @@
       </p:sp>
       <p:sp>
         <p:nvSpPr>
-          <p:cNvPr id="19" name="카드 2"/>
+          <p:cNvPr id="8" name="카드 2"/>
           <p:cNvSpPr/>
           <p:nvPr/>
         </p:nvSpPr>
@@ -6477,7 +5159,7 @@
       </p:sp>
       <p:sp>
         <p:nvSpPr>
-          <p:cNvPr id="20" name="번호 2"/>
+          <p:cNvPr id="9" name="번호 2"/>
           <p:cNvSpPr/>
           <p:nvPr/>
         </p:nvSpPr>
@@ -6520,7 +5202,7 @@
       </p:sp>
       <p:sp>
         <p:nvSpPr>
-          <p:cNvPr id="21" name="TextBox 20"/>
+          <p:cNvPr id="10" name="TextBox 9"/>
           <p:cNvSpPr txBox="1"/>
           <p:nvPr/>
         </p:nvSpPr>
@@ -6558,7 +5240,7 @@
       </p:sp>
       <p:sp>
         <p:nvSpPr>
-          <p:cNvPr id="22" name="TextBox 21"/>
+          <p:cNvPr id="11" name="TextBox 10"/>
           <p:cNvSpPr txBox="1"/>
           <p:nvPr/>
         </p:nvSpPr>
@@ -6596,7 +5278,7 @@
       </p:sp>
       <p:sp>
         <p:nvSpPr>
-          <p:cNvPr id="23" name="카드 3"/>
+          <p:cNvPr id="12" name="카드 3"/>
           <p:cNvSpPr/>
           <p:nvPr/>
         </p:nvSpPr>
@@ -6629,7 +5311,7 @@
       </p:sp>
       <p:sp>
         <p:nvSpPr>
-          <p:cNvPr id="24" name="번호 3"/>
+          <p:cNvPr id="13" name="번호 3"/>
           <p:cNvSpPr/>
           <p:nvPr/>
         </p:nvSpPr>
@@ -6672,7 +5354,7 @@
       </p:sp>
       <p:sp>
         <p:nvSpPr>
-          <p:cNvPr id="25" name="TextBox 24"/>
+          <p:cNvPr id="14" name="TextBox 13"/>
           <p:cNvSpPr txBox="1"/>
           <p:nvPr/>
         </p:nvSpPr>
@@ -6710,7 +5392,7 @@
       </p:sp>
       <p:sp>
         <p:nvSpPr>
-          <p:cNvPr id="26" name="TextBox 25"/>
+          <p:cNvPr id="15" name="TextBox 14"/>
           <p:cNvSpPr txBox="1"/>
           <p:nvPr/>
         </p:nvSpPr>
@@ -6748,7 +5430,7 @@
       </p:sp>
       <p:sp>
         <p:nvSpPr>
-          <p:cNvPr id="27" name="카드 4"/>
+          <p:cNvPr id="16" name="카드 4"/>
           <p:cNvSpPr/>
           <p:nvPr/>
         </p:nvSpPr>
@@ -6781,7 +5463,7 @@
       </p:sp>
       <p:sp>
         <p:nvSpPr>
-          <p:cNvPr id="28" name="번호 4"/>
+          <p:cNvPr id="17" name="번호 4"/>
           <p:cNvSpPr/>
           <p:nvPr/>
         </p:nvSpPr>
@@ -6824,7 +5506,7 @@
       </p:sp>
       <p:sp>
         <p:nvSpPr>
-          <p:cNvPr id="29" name="TextBox 28"/>
+          <p:cNvPr id="18" name="TextBox 17"/>
           <p:cNvSpPr txBox="1"/>
           <p:nvPr/>
         </p:nvSpPr>
@@ -6862,7 +5544,7 @@
       </p:sp>
       <p:sp>
         <p:nvSpPr>
-          <p:cNvPr id="30" name="TextBox 29"/>
+          <p:cNvPr id="19" name="TextBox 18"/>
           <p:cNvSpPr txBox="1"/>
           <p:nvPr/>
         </p:nvSpPr>
@@ -6955,325 +5637,6 @@
       </p:sp>
       <p:sp>
         <p:nvSpPr>
-          <p:cNvPr id="4" name="장식"/>
-          <p:cNvSpPr/>
-          <p:nvPr/>
-        </p:nvSpPr>
-        <p:spPr>
-          <a:xfrm>
-            <a:off x="10691076" y="489607"/>
-            <a:ext cx="195353" cy="195353"/>
-          </a:xfrm>
-          <a:prstGeom prst="ellipse">
-            <a:avLst/>
-          </a:prstGeom>
-          <a:solidFill>
-            <a:srgbClr val="AE7429"/>
-          </a:solidFill>
-          <a:ln>
-            <a:noFill/>
-          </a:ln>
-        </p:spPr>
-        <p:txBody>
-          <a:bodyPr rtlCol="0" anchor="ctr"/>
-          <a:lstStyle/>
-          <a:p>
-            <a:pPr algn="ctr"/>
-          </a:p>
-        </p:txBody>
-      </p:sp>
-      <p:sp>
-        <p:nvSpPr>
-          <p:cNvPr id="5" name="장식"/>
-          <p:cNvSpPr/>
-          <p:nvPr/>
-        </p:nvSpPr>
-        <p:spPr>
-          <a:xfrm>
-            <a:off x="11265390" y="555182"/>
-            <a:ext cx="118957" cy="118957"/>
-          </a:xfrm>
-          <a:prstGeom prst="ellipse">
-            <a:avLst/>
-          </a:prstGeom>
-          <a:solidFill>
-            <a:srgbClr val="F5E3CC"/>
-          </a:solidFill>
-          <a:ln>
-            <a:noFill/>
-          </a:ln>
-        </p:spPr>
-        <p:txBody>
-          <a:bodyPr rtlCol="0" anchor="ctr"/>
-          <a:lstStyle/>
-          <a:p>
-            <a:pPr algn="ctr"/>
-          </a:p>
-        </p:txBody>
-      </p:sp>
-      <p:sp>
-        <p:nvSpPr>
-          <p:cNvPr id="6" name="장식"/>
-          <p:cNvSpPr/>
-          <p:nvPr/>
-        </p:nvSpPr>
-        <p:spPr>
-          <a:xfrm>
-            <a:off x="11546210" y="1260630"/>
-            <a:ext cx="126058" cy="126058"/>
-          </a:xfrm>
-          <a:prstGeom prst="ellipse">
-            <a:avLst/>
-          </a:prstGeom>
-          <a:solidFill>
-            <a:srgbClr val="3B8B91"/>
-          </a:solidFill>
-          <a:ln>
-            <a:noFill/>
-          </a:ln>
-        </p:spPr>
-        <p:txBody>
-          <a:bodyPr rtlCol="0" anchor="ctr"/>
-          <a:lstStyle/>
-          <a:p>
-            <a:pPr algn="ctr"/>
-          </a:p>
-        </p:txBody>
-      </p:sp>
-      <p:sp>
-        <p:nvSpPr>
-          <p:cNvPr id="7" name="장식"/>
-          <p:cNvSpPr/>
-          <p:nvPr/>
-        </p:nvSpPr>
-        <p:spPr>
-          <a:xfrm>
-            <a:off x="11377933" y="601087"/>
-            <a:ext cx="93564" cy="93564"/>
-          </a:xfrm>
-          <a:prstGeom prst="ellipse">
-            <a:avLst/>
-          </a:prstGeom>
-          <a:solidFill>
-            <a:srgbClr val="AE7429"/>
-          </a:solidFill>
-          <a:ln>
-            <a:noFill/>
-          </a:ln>
-        </p:spPr>
-        <p:txBody>
-          <a:bodyPr rtlCol="0" anchor="ctr"/>
-          <a:lstStyle/>
-          <a:p>
-            <a:pPr algn="ctr"/>
-          </a:p>
-        </p:txBody>
-      </p:sp>
-      <p:sp>
-        <p:nvSpPr>
-          <p:cNvPr id="8" name="장식"/>
-          <p:cNvSpPr/>
-          <p:nvPr/>
-        </p:nvSpPr>
-        <p:spPr>
-          <a:xfrm>
-            <a:off x="10833017" y="314922"/>
-            <a:ext cx="102193" cy="102193"/>
-          </a:xfrm>
-          <a:prstGeom prst="ellipse">
-            <a:avLst/>
-          </a:prstGeom>
-          <a:solidFill>
-            <a:srgbClr val="F5E3CC"/>
-          </a:solidFill>
-          <a:ln>
-            <a:noFill/>
-          </a:ln>
-        </p:spPr>
-        <p:txBody>
-          <a:bodyPr rtlCol="0" anchor="ctr"/>
-          <a:lstStyle/>
-          <a:p>
-            <a:pPr algn="ctr"/>
-          </a:p>
-        </p:txBody>
-      </p:sp>
-      <p:sp>
-        <p:nvSpPr>
-          <p:cNvPr id="9" name="장식"/>
-          <p:cNvSpPr/>
-          <p:nvPr/>
-        </p:nvSpPr>
-        <p:spPr>
-          <a:xfrm>
-            <a:off x="11729729" y="1170282"/>
-            <a:ext cx="168803" cy="168803"/>
-          </a:xfrm>
-          <a:prstGeom prst="ellipse">
-            <a:avLst/>
-          </a:prstGeom>
-          <a:solidFill>
-            <a:srgbClr val="3B8B91"/>
-          </a:solidFill>
-          <a:ln>
-            <a:noFill/>
-          </a:ln>
-        </p:spPr>
-        <p:txBody>
-          <a:bodyPr rtlCol="0" anchor="ctr"/>
-          <a:lstStyle/>
-          <a:p>
-            <a:pPr algn="ctr"/>
-          </a:p>
-        </p:txBody>
-      </p:sp>
-      <p:sp>
-        <p:nvSpPr>
-          <p:cNvPr id="10" name="장식"/>
-          <p:cNvSpPr/>
-          <p:nvPr/>
-        </p:nvSpPr>
-        <p:spPr>
-          <a:xfrm>
-            <a:off x="11439796" y="376285"/>
-            <a:ext cx="196620" cy="196620"/>
-          </a:xfrm>
-          <a:prstGeom prst="ellipse">
-            <a:avLst/>
-          </a:prstGeom>
-          <a:solidFill>
-            <a:srgbClr val="AE7429"/>
-          </a:solidFill>
-          <a:ln>
-            <a:noFill/>
-          </a:ln>
-        </p:spPr>
-        <p:txBody>
-          <a:bodyPr rtlCol="0" anchor="ctr"/>
-          <a:lstStyle/>
-          <a:p>
-            <a:pPr algn="ctr"/>
-          </a:p>
-        </p:txBody>
-      </p:sp>
-      <p:sp>
-        <p:nvSpPr>
-          <p:cNvPr id="11" name="장식"/>
-          <p:cNvSpPr/>
-          <p:nvPr/>
-        </p:nvSpPr>
-        <p:spPr>
-          <a:xfrm>
-            <a:off x="11100531" y="396632"/>
-            <a:ext cx="154484" cy="154484"/>
-          </a:xfrm>
-          <a:prstGeom prst="ellipse">
-            <a:avLst/>
-          </a:prstGeom>
-          <a:solidFill>
-            <a:srgbClr val="F5E3CC"/>
-          </a:solidFill>
-          <a:ln>
-            <a:noFill/>
-          </a:ln>
-        </p:spPr>
-        <p:txBody>
-          <a:bodyPr rtlCol="0" anchor="ctr"/>
-          <a:lstStyle/>
-          <a:p>
-            <a:pPr algn="ctr"/>
-          </a:p>
-        </p:txBody>
-      </p:sp>
-      <p:sp>
-        <p:nvSpPr>
-          <p:cNvPr id="12" name="장식"/>
-          <p:cNvSpPr/>
-          <p:nvPr/>
-        </p:nvSpPr>
-        <p:spPr>
-          <a:xfrm>
-            <a:off x="11813352" y="760719"/>
-            <a:ext cx="116170" cy="116170"/>
-          </a:xfrm>
-          <a:prstGeom prst="ellipse">
-            <a:avLst/>
-          </a:prstGeom>
-          <a:solidFill>
-            <a:srgbClr val="3B8B91"/>
-          </a:solidFill>
-          <a:ln>
-            <a:noFill/>
-          </a:ln>
-        </p:spPr>
-        <p:txBody>
-          <a:bodyPr rtlCol="0" anchor="ctr"/>
-          <a:lstStyle/>
-          <a:p>
-            <a:pPr algn="ctr"/>
-          </a:p>
-        </p:txBody>
-      </p:sp>
-      <p:sp>
-        <p:nvSpPr>
-          <p:cNvPr id="13" name="장식"/>
-          <p:cNvSpPr/>
-          <p:nvPr/>
-        </p:nvSpPr>
-        <p:spPr>
-          <a:xfrm>
-            <a:off x="11573225" y="943562"/>
-            <a:ext cx="136804" cy="136804"/>
-          </a:xfrm>
-          <a:prstGeom prst="ellipse">
-            <a:avLst/>
-          </a:prstGeom>
-          <a:solidFill>
-            <a:srgbClr val="AE7429"/>
-          </a:solidFill>
-          <a:ln>
-            <a:noFill/>
-          </a:ln>
-        </p:spPr>
-        <p:txBody>
-          <a:bodyPr rtlCol="0" anchor="ctr"/>
-          <a:lstStyle/>
-          <a:p>
-            <a:pPr algn="ctr"/>
-          </a:p>
-        </p:txBody>
-      </p:sp>
-      <p:sp>
-        <p:nvSpPr>
-          <p:cNvPr id="14" name="장식"/>
-          <p:cNvSpPr/>
-          <p:nvPr/>
-        </p:nvSpPr>
-        <p:spPr>
-          <a:xfrm>
-            <a:off x="10863999" y="217553"/>
-            <a:ext cx="159934" cy="159934"/>
-          </a:xfrm>
-          <a:prstGeom prst="ellipse">
-            <a:avLst/>
-          </a:prstGeom>
-          <a:solidFill>
-            <a:srgbClr val="F5E3CC"/>
-          </a:solidFill>
-          <a:ln>
-            <a:noFill/>
-          </a:ln>
-        </p:spPr>
-        <p:txBody>
-          <a:bodyPr rtlCol="0" anchor="ctr"/>
-          <a:lstStyle/>
-          <a:p>
-            <a:pPr algn="ctr"/>
-          </a:p>
-        </p:txBody>
-      </p:sp>
-      <p:sp>
-        <p:nvSpPr>
           <p:cNvPr id="2" name="Title 1"/>
           <p:cNvSpPr>
             <a:spLocks noGrp="1"/>
@@ -7312,7 +5675,7 @@
       </p:sp>
       <p:sp>
         <p:nvSpPr>
-          <p:cNvPr id="15" name="사진 자리"/>
+          <p:cNvPr id="4" name="사진 자리"/>
           <p:cNvSpPr/>
           <p:nvPr/>
         </p:nvSpPr>
@@ -7360,7 +5723,7 @@
       </p:sp>
       <p:sp>
         <p:nvSpPr>
-          <p:cNvPr id="16" name="사진 자리"/>
+          <p:cNvPr id="5" name="사진 자리"/>
           <p:cNvSpPr/>
           <p:nvPr/>
         </p:nvSpPr>
@@ -7408,7 +5771,7 @@
       </p:sp>
       <p:sp>
         <p:nvSpPr>
-          <p:cNvPr id="17" name="사진 자리"/>
+          <p:cNvPr id="6" name="사진 자리"/>
           <p:cNvSpPr/>
           <p:nvPr/>
         </p:nvSpPr>
@@ -7456,7 +5819,7 @@
       </p:sp>
       <p:sp>
         <p:nvSpPr>
-          <p:cNvPr id="18" name="사진 자리"/>
+          <p:cNvPr id="7" name="사진 자리"/>
           <p:cNvSpPr/>
           <p:nvPr/>
         </p:nvSpPr>
@@ -7504,7 +5867,7 @@
       </p:sp>
       <p:sp>
         <p:nvSpPr>
-          <p:cNvPr id="19" name="사진 자리"/>
+          <p:cNvPr id="8" name="사진 자리"/>
           <p:cNvSpPr/>
           <p:nvPr/>
         </p:nvSpPr>
@@ -7552,7 +5915,7 @@
       </p:sp>
       <p:sp>
         <p:nvSpPr>
-          <p:cNvPr id="20" name="사진 자리"/>
+          <p:cNvPr id="9" name="사진 자리"/>
           <p:cNvSpPr/>
           <p:nvPr/>
         </p:nvSpPr>
@@ -7600,7 +5963,7 @@
       </p:sp>
       <p:sp>
         <p:nvSpPr>
-          <p:cNvPr id="21" name="사진 자리"/>
+          <p:cNvPr id="10" name="사진 자리"/>
           <p:cNvSpPr/>
           <p:nvPr/>
         </p:nvSpPr>
@@ -7648,7 +6011,7 @@
       </p:sp>
       <p:sp>
         <p:nvSpPr>
-          <p:cNvPr id="22" name="사진 자리"/>
+          <p:cNvPr id="11" name="사진 자리"/>
           <p:cNvSpPr/>
           <p:nvPr/>
         </p:nvSpPr>
@@ -7705,14 +6068,6 @@
 <file path=ppt/slides/slide6.xml><?xml version="1.0" encoding="utf-8"?>
 <p:sld xmlns:a="http://schemas.openxmlformats.org/drawingml/2006/main" xmlns:p="http://schemas.openxmlformats.org/presentationml/2006/main" xmlns:r="http://schemas.openxmlformats.org/officeDocument/2006/relationships">
   <p:cSld>
-    <p:bg>
-      <p:bgPr>
-        <a:solidFill>
-          <a:srgbClr val="FFFFFF"/>
-        </a:solidFill>
-        <a:effectLst/>
-      </p:bgPr>
-    </p:bg>
     <p:spTree>
       <p:nvGrpSpPr>
         <p:cNvPr id="1" name=""/>
@@ -7720,383 +6075,30 @@
         <p:nvPr/>
       </p:nvGrpSpPr>
       <p:grpSpPr/>
-      <p:sp>
-        <p:nvSpPr>
-          <p:cNvPr id="3" name="장식"/>
-          <p:cNvSpPr/>
+      <p:pic>
+        <p:nvPicPr>
+          <p:cNvPr id="3" name="표지 그림" descr="birthday-40.jpg"/>
+          <p:cNvPicPr>
+            <a:picLocks noChangeAspect="1"/>
+          </p:cNvPicPr>
           <p:nvPr/>
-        </p:nvSpPr>
-        <p:spPr>
-          <a:xfrm>
-            <a:off x="0" y="2057400"/>
-            <a:ext cx="10241023" cy="1828800"/>
-          </a:xfrm>
-          <a:prstGeom prst="homePlate">
-            <a:avLst/>
-          </a:prstGeom>
-          <a:solidFill>
-            <a:srgbClr val="AE7429"/>
-          </a:solidFill>
-          <a:ln>
-            <a:noFill/>
-          </a:ln>
-        </p:spPr>
-        <p:txBody>
-          <a:bodyPr rtlCol="0" anchor="ctr"/>
-          <a:lstStyle/>
-          <a:p>
-            <a:pPr algn="ctr"/>
-          </a:p>
-        </p:txBody>
-      </p:sp>
-      <p:sp>
-        <p:nvSpPr>
-          <p:cNvPr id="4" name="장식"/>
-          <p:cNvSpPr/>
-          <p:nvPr/>
-        </p:nvSpPr>
-        <p:spPr>
-          <a:xfrm>
-            <a:off x="0" y="3886200"/>
-            <a:ext cx="9509522" cy="64008"/>
+        </p:nvPicPr>
+        <p:blipFill>
+          <a:blip r:embed="rId2"/>
+          <a:stretch>
+            <a:fillRect/>
+          </a:stretch>
+        </p:blipFill>
+        <p:spPr>
+          <a:xfrm>
+            <a:off x="0" y="0"/>
+            <a:ext cx="12191695" cy="6858000"/>
           </a:xfrm>
           <a:prstGeom prst="rect">
             <a:avLst/>
           </a:prstGeom>
-          <a:solidFill>
-            <a:srgbClr val="3B8B91"/>
-          </a:solidFill>
-          <a:ln>
-            <a:noFill/>
-          </a:ln>
-        </p:spPr>
-        <p:txBody>
-          <a:bodyPr rtlCol="0" anchor="ctr"/>
-          <a:lstStyle/>
-          <a:p>
-            <a:pPr algn="ctr"/>
-          </a:p>
-        </p:txBody>
-      </p:sp>
-      <p:sp>
-        <p:nvSpPr>
-          <p:cNvPr id="5" name="장식"/>
-          <p:cNvSpPr/>
-          <p:nvPr/>
-        </p:nvSpPr>
-        <p:spPr>
-          <a:xfrm>
-            <a:off x="9263744" y="704815"/>
-            <a:ext cx="452864" cy="452864"/>
-          </a:xfrm>
-          <a:prstGeom prst="ellipse">
-            <a:avLst/>
-          </a:prstGeom>
-          <a:solidFill>
-            <a:srgbClr val="AE7429"/>
-          </a:solidFill>
-          <a:ln>
-            <a:noFill/>
-          </a:ln>
-        </p:spPr>
-        <p:txBody>
-          <a:bodyPr rtlCol="0" anchor="ctr"/>
-          <a:lstStyle/>
-          <a:p>
-            <a:pPr algn="ctr"/>
-          </a:p>
-        </p:txBody>
-      </p:sp>
-      <p:sp>
-        <p:nvSpPr>
-          <p:cNvPr id="6" name="장식"/>
-          <p:cNvSpPr/>
-          <p:nvPr/>
-        </p:nvSpPr>
-        <p:spPr>
-          <a:xfrm>
-            <a:off x="10595107" y="856829"/>
-            <a:ext cx="275764" cy="275764"/>
-          </a:xfrm>
-          <a:prstGeom prst="ellipse">
-            <a:avLst/>
-          </a:prstGeom>
-          <a:solidFill>
-            <a:srgbClr val="F5E3CC"/>
-          </a:solidFill>
-          <a:ln>
-            <a:noFill/>
-          </a:ln>
-        </p:spPr>
-        <p:txBody>
-          <a:bodyPr rtlCol="0" anchor="ctr"/>
-          <a:lstStyle/>
-          <a:p>
-            <a:pPr algn="ctr"/>
-          </a:p>
-        </p:txBody>
-      </p:sp>
-      <p:sp>
-        <p:nvSpPr>
-          <p:cNvPr id="7" name="장식"/>
-          <p:cNvSpPr/>
-          <p:nvPr/>
-        </p:nvSpPr>
-        <p:spPr>
-          <a:xfrm>
-            <a:off x="11246098" y="2492187"/>
-            <a:ext cx="292227" cy="292227"/>
-          </a:xfrm>
-          <a:prstGeom prst="ellipse">
-            <a:avLst/>
-          </a:prstGeom>
-          <a:solidFill>
-            <a:srgbClr val="3B8B91"/>
-          </a:solidFill>
-          <a:ln>
-            <a:noFill/>
-          </a:ln>
-        </p:spPr>
-        <p:txBody>
-          <a:bodyPr rtlCol="0" anchor="ctr"/>
-          <a:lstStyle/>
-          <a:p>
-            <a:pPr algn="ctr"/>
-          </a:p>
-        </p:txBody>
-      </p:sp>
-      <p:sp>
-        <p:nvSpPr>
-          <p:cNvPr id="8" name="장식"/>
-          <p:cNvSpPr/>
-          <p:nvPr/>
-        </p:nvSpPr>
-        <p:spPr>
-          <a:xfrm>
-            <a:off x="10856002" y="963247"/>
-            <a:ext cx="216899" cy="216899"/>
-          </a:xfrm>
-          <a:prstGeom prst="ellipse">
-            <a:avLst/>
-          </a:prstGeom>
-          <a:solidFill>
-            <a:srgbClr val="AE7429"/>
-          </a:solidFill>
-          <a:ln>
-            <a:noFill/>
-          </a:ln>
-        </p:spPr>
-        <p:txBody>
-          <a:bodyPr rtlCol="0" anchor="ctr"/>
-          <a:lstStyle/>
-          <a:p>
-            <a:pPr algn="ctr"/>
-          </a:p>
-        </p:txBody>
-      </p:sp>
-      <p:sp>
-        <p:nvSpPr>
-          <p:cNvPr id="9" name="장식"/>
-          <p:cNvSpPr/>
-          <p:nvPr/>
-        </p:nvSpPr>
-        <p:spPr>
-          <a:xfrm>
-            <a:off x="9592789" y="299863"/>
-            <a:ext cx="236902" cy="236902"/>
-          </a:xfrm>
-          <a:prstGeom prst="ellipse">
-            <a:avLst/>
-          </a:prstGeom>
-          <a:solidFill>
-            <a:srgbClr val="F5E3CC"/>
-          </a:solidFill>
-          <a:ln>
-            <a:noFill/>
-          </a:ln>
-        </p:spPr>
-        <p:txBody>
-          <a:bodyPr rtlCol="0" anchor="ctr"/>
-          <a:lstStyle/>
-          <a:p>
-            <a:pPr algn="ctr"/>
-          </a:p>
-        </p:txBody>
-      </p:sp>
-      <p:sp>
-        <p:nvSpPr>
-          <p:cNvPr id="10" name="장식"/>
-          <p:cNvSpPr/>
-          <p:nvPr/>
-        </p:nvSpPr>
-        <p:spPr>
-          <a:xfrm>
-            <a:off x="11671528" y="2282743"/>
-            <a:ext cx="391317" cy="391317"/>
-          </a:xfrm>
-          <a:prstGeom prst="ellipse">
-            <a:avLst/>
-          </a:prstGeom>
-          <a:solidFill>
-            <a:srgbClr val="3B8B91"/>
-          </a:solidFill>
-          <a:ln>
-            <a:noFill/>
-          </a:ln>
-        </p:spPr>
-        <p:txBody>
-          <a:bodyPr rtlCol="0" anchor="ctr"/>
-          <a:lstStyle/>
-          <a:p>
-            <a:pPr algn="ctr"/>
-          </a:p>
-        </p:txBody>
-      </p:sp>
-      <p:sp>
-        <p:nvSpPr>
-          <p:cNvPr id="11" name="장식"/>
-          <p:cNvSpPr/>
-          <p:nvPr/>
-        </p:nvSpPr>
-        <p:spPr>
-          <a:xfrm>
-            <a:off x="10999413" y="442115"/>
-            <a:ext cx="455801" cy="455801"/>
-          </a:xfrm>
-          <a:prstGeom prst="ellipse">
-            <a:avLst/>
-          </a:prstGeom>
-          <a:solidFill>
-            <a:srgbClr val="AE7429"/>
-          </a:solidFill>
-          <a:ln>
-            <a:noFill/>
-          </a:ln>
-        </p:spPr>
-        <p:txBody>
-          <a:bodyPr rtlCol="0" anchor="ctr"/>
-          <a:lstStyle/>
-          <a:p>
-            <a:pPr algn="ctr"/>
-          </a:p>
-        </p:txBody>
-      </p:sp>
-      <p:sp>
-        <p:nvSpPr>
-          <p:cNvPr id="12" name="장식"/>
-          <p:cNvSpPr/>
-          <p:nvPr/>
-        </p:nvSpPr>
-        <p:spPr>
-          <a:xfrm>
-            <a:off x="10212933" y="489281"/>
-            <a:ext cx="358123" cy="358123"/>
-          </a:xfrm>
-          <a:prstGeom prst="ellipse">
-            <a:avLst/>
-          </a:prstGeom>
-          <a:solidFill>
-            <a:srgbClr val="F5E3CC"/>
-          </a:solidFill>
-          <a:ln>
-            <a:noFill/>
-          </a:ln>
-        </p:spPr>
-        <p:txBody>
-          <a:bodyPr rtlCol="0" anchor="ctr"/>
-          <a:lstStyle/>
-          <a:p>
-            <a:pPr algn="ctr"/>
-          </a:p>
-        </p:txBody>
-      </p:sp>
-      <p:sp>
-        <p:nvSpPr>
-          <p:cNvPr id="13" name="장식"/>
-          <p:cNvSpPr/>
-          <p:nvPr/>
-        </p:nvSpPr>
-        <p:spPr>
-          <a:xfrm>
-            <a:off x="11865382" y="1333302"/>
-            <a:ext cx="269303" cy="269303"/>
-          </a:xfrm>
-          <a:prstGeom prst="ellipse">
-            <a:avLst/>
-          </a:prstGeom>
-          <a:solidFill>
-            <a:srgbClr val="3B8B91"/>
-          </a:solidFill>
-          <a:ln>
-            <a:noFill/>
-          </a:ln>
-        </p:spPr>
-        <p:txBody>
-          <a:bodyPr rtlCol="0" anchor="ctr"/>
-          <a:lstStyle/>
-          <a:p>
-            <a:pPr algn="ctr"/>
-          </a:p>
-        </p:txBody>
-      </p:sp>
-      <p:sp>
-        <p:nvSpPr>
-          <p:cNvPr id="14" name="장식"/>
-          <p:cNvSpPr/>
-          <p:nvPr/>
-        </p:nvSpPr>
-        <p:spPr>
-          <a:xfrm>
-            <a:off x="11308724" y="1757165"/>
-            <a:ext cx="317138" cy="317138"/>
-          </a:xfrm>
-          <a:prstGeom prst="ellipse">
-            <a:avLst/>
-          </a:prstGeom>
-          <a:solidFill>
-            <a:srgbClr val="AE7429"/>
-          </a:solidFill>
-          <a:ln>
-            <a:noFill/>
-          </a:ln>
-        </p:spPr>
-        <p:txBody>
-          <a:bodyPr rtlCol="0" anchor="ctr"/>
-          <a:lstStyle/>
-          <a:p>
-            <a:pPr algn="ctr"/>
-          </a:p>
-        </p:txBody>
-      </p:sp>
-      <p:sp>
-        <p:nvSpPr>
-          <p:cNvPr id="15" name="장식"/>
-          <p:cNvSpPr/>
-          <p:nvPr/>
-        </p:nvSpPr>
-        <p:spPr>
-          <a:xfrm>
-            <a:off x="9664609" y="74145"/>
-            <a:ext cx="370756" cy="370756"/>
-          </a:xfrm>
-          <a:prstGeom prst="ellipse">
-            <a:avLst/>
-          </a:prstGeom>
-          <a:solidFill>
-            <a:srgbClr val="F5E3CC"/>
-          </a:solidFill>
-          <a:ln>
-            <a:noFill/>
-          </a:ln>
-        </p:spPr>
-        <p:txBody>
-          <a:bodyPr rtlCol="0" anchor="ctr"/>
-          <a:lstStyle/>
-          <a:p>
-            <a:pPr algn="ctr"/>
-          </a:p>
-        </p:txBody>
-      </p:sp>
+        </p:spPr>
+      </p:pic>
       <p:sp>
         <p:nvSpPr>
           <p:cNvPr id="2" name="Title 1"/>
@@ -8109,8 +6111,8 @@
         </p:nvSpPr>
         <p:spPr>
           <a:xfrm>
-            <a:off x="731501" y="2167128"/>
-            <a:ext cx="8778020" cy="1609344"/>
+            <a:off x="853418" y="2057400"/>
+            <a:ext cx="6095847" cy="1554480"/>
           </a:xfrm>
         </p:spPr>
         <p:txBody>
@@ -8127,24 +6129,24 @@
             <a:r>
               <a:rPr sz="3400" b="1" i="0">
                 <a:solidFill>
-                  <a:srgbClr val="FFFFFF"/>
+                  <a:srgbClr val="5B3D15"/>
                 </a:solidFill>
               </a:rPr>
-              <a:t>함께해 주셔서 감사합니다</a:t>
-            </a:r>
-          </a:p>
-        </p:txBody>
-      </p:sp>
-      <p:sp>
-        <p:nvSpPr>
-          <p:cNvPr id="16" name="한 줄 문구"/>
+              <a:t>와 주셔서 고맙습니다</a:t>
+            </a:r>
+          </a:p>
+        </p:txBody>
+      </p:sp>
+      <p:sp>
+        <p:nvSpPr>
+          <p:cNvPr id="4" name="한 줄 문구"/>
           <p:cNvSpPr txBox="1"/>
           <p:nvPr/>
         </p:nvSpPr>
         <p:spPr>
           <a:xfrm>
-            <a:off x="731501" y="4160520"/>
-            <a:ext cx="8534186" cy="822960"/>
+            <a:off x="853418" y="3749039"/>
+            <a:ext cx="6095847" cy="822960"/>
           </a:xfrm>
           <a:prstGeom prst="rect">
             <a:avLst/>
@@ -8168,21 +6170,21 @@
                   <a:srgbClr val="5B3D15"/>
                 </a:solidFill>
               </a:rPr>
-              <a:t>첫 번째 생일을 축하해 주셔서 고맙습니다</a:t>
-            </a:r>
-          </a:p>
-        </p:txBody>
-      </p:sp>
-      <p:sp>
-        <p:nvSpPr>
-          <p:cNvPr id="17" name="안내 문구"/>
+              <a:t>아이가 한 살이 되었습니다</a:t>
+            </a:r>
+          </a:p>
+        </p:txBody>
+      </p:sp>
+      <p:sp>
+        <p:nvSpPr>
+          <p:cNvPr id="5" name="안내 문구"/>
           <p:cNvSpPr txBox="1"/>
           <p:nvPr/>
         </p:nvSpPr>
         <p:spPr>
           <a:xfrm>
-            <a:off x="731501" y="5029200"/>
-            <a:ext cx="8534186" cy="914400"/>
+            <a:off x="853418" y="4617720"/>
+            <a:ext cx="6095847" cy="914400"/>
           </a:xfrm>
           <a:prstGeom prst="rect">
             <a:avLst/>
